--- a/Presentation/SIH2026_VOLTRA.pptx
+++ b/Presentation/SIH2026_VOLTRA.pptx
@@ -4673,7 +4673,7 @@
                 <a16:creationId xmlns:a16="http://schemas.microsoft.com/office/drawing/2014/main" id="{3E443FD7-A66B-4AA0-872D-B088B9BC5F17}"/>
               </a:ext>
               <a:ext uri="{C183D7F6-B498-43B3-948B-1728B52AA6E4}">
-                <adec:decorative xmlns:adec="http://schemas.microsoft.com/office/drawing/2017/decorative" xmlns="" val="1"/>
+                <adec:decorative xmlns="" xmlns:adec="http://schemas.microsoft.com/office/drawing/2017/decorative" val="1"/>
               </a:ext>
             </a:extLst>
           </p:cNvPr>
@@ -4733,7 +4733,7 @@
                 <a16:creationId xmlns:a16="http://schemas.microsoft.com/office/drawing/2014/main" id="{C04BE0EF-3561-49B4-9A29-F283168A91C7}"/>
               </a:ext>
               <a:ext uri="{C183D7F6-B498-43B3-948B-1728B52AA6E4}">
-                <adec:decorative xmlns:adec="http://schemas.microsoft.com/office/drawing/2017/decorative" xmlns="" val="1"/>
+                <adec:decorative xmlns="" xmlns:adec="http://schemas.microsoft.com/office/drawing/2017/decorative" val="1"/>
               </a:ext>
             </a:extLst>
           </p:cNvPr>
@@ -5752,8 +5752,26 @@
                 <a:latin typeface="Times New Roman" pitchFamily="18" charset="0"/>
                 <a:cs typeface="Times New Roman" pitchFamily="18" charset="0"/>
               </a:rPr>
-              <a:t>Team ID-</a:t>
-            </a:r>
+              <a:t>Team </a:t>
+            </a:r>
+            <a:r>
+              <a:rPr lang="en-US" b="1" dirty="0">
+                <a:latin typeface="Times New Roman" pitchFamily="18" charset="0"/>
+                <a:cs typeface="Times New Roman" pitchFamily="18" charset="0"/>
+              </a:rPr>
+              <a:t>ID- </a:t>
+            </a:r>
+            <a:r>
+              <a:rPr lang="en-US" dirty="0">
+                <a:latin typeface="Times New Roman" pitchFamily="18" charset="0"/>
+                <a:cs typeface="Times New Roman" pitchFamily="18" charset="0"/>
+              </a:rPr>
+              <a:t>168797</a:t>
+            </a:r>
+            <a:endParaRPr lang="en-US" dirty="0">
+              <a:latin typeface="Times New Roman" pitchFamily="18" charset="0"/>
+              <a:cs typeface="Times New Roman" pitchFamily="18" charset="0"/>
+            </a:endParaRPr>
           </a:p>
           <a:p>
             <a:pPr marL="285750" indent="-285750" algn="just">
@@ -6665,7 +6683,7 @@
                 <a16:creationId xmlns:a16="http://schemas.microsoft.com/office/drawing/2014/main" id="{3954019C-7644-2D51-1936-33B0FF452363}"/>
               </a:ext>
               <a:ext uri="{C183D7F6-B498-43B3-948B-1728B52AA6E4}">
-                <adec:decorative xmlns:adec="http://schemas.microsoft.com/office/drawing/2017/decorative" xmlns="" val="0"/>
+                <adec:decorative xmlns="" xmlns:adec="http://schemas.microsoft.com/office/drawing/2017/decorative" val="0"/>
               </a:ext>
             </a:extLst>
           </p:cNvPr>
@@ -7191,7 +7209,7 @@
                 <a16:creationId xmlns:a16="http://schemas.microsoft.com/office/drawing/2014/main" id="{5DBCE864-823D-4A13-9607-5DA1F0ED5FB8}"/>
               </a:ext>
               <a:ext uri="{C183D7F6-B498-43B3-948B-1728B52AA6E4}">
-                <adec:decorative xmlns:adec="http://schemas.microsoft.com/office/drawing/2017/decorative" xmlns="" val="0"/>
+                <adec:decorative xmlns="" xmlns:adec="http://schemas.microsoft.com/office/drawing/2017/decorative" val="0"/>
               </a:ext>
             </a:extLst>
           </p:cNvPr>
@@ -9172,7 +9190,7 @@
                 <a16:creationId xmlns:a16="http://schemas.microsoft.com/office/drawing/2014/main" id="{01450D81-0FD1-514C-AD1E-4FF140367C5C}"/>
               </a:ext>
               <a:ext uri="{C183D7F6-B498-43B3-948B-1728B52AA6E4}">
-                <adec:decorative xmlns:adec="http://schemas.microsoft.com/office/drawing/2017/decorative" xmlns="" val="0"/>
+                <adec:decorative xmlns="" xmlns:adec="http://schemas.microsoft.com/office/drawing/2017/decorative" val="0"/>
               </a:ext>
             </a:extLst>
           </p:cNvPr>
@@ -9662,7 +9680,7 @@
                 <a16:creationId xmlns:a16="http://schemas.microsoft.com/office/drawing/2014/main" id="{5F2A1458-AB2F-330D-5576-D5CA673A3456}"/>
               </a:ext>
               <a:ext uri="{C183D7F6-B498-43B3-948B-1728B52AA6E4}">
-                <adec:decorative xmlns:adec="http://schemas.microsoft.com/office/drawing/2017/decorative" xmlns="" val="0"/>
+                <adec:decorative xmlns="" xmlns:adec="http://schemas.microsoft.com/office/drawing/2017/decorative" val="0"/>
               </a:ext>
             </a:extLst>
           </p:cNvPr>
@@ -11096,7 +11114,7 @@
                 <a16:creationId xmlns:a16="http://schemas.microsoft.com/office/drawing/2014/main" id="{3450D2CC-6161-66B7-2A4A-F3B79140B86C}"/>
               </a:ext>
               <a:ext uri="{C183D7F6-B498-43B3-948B-1728B52AA6E4}">
-                <adec:decorative xmlns:adec="http://schemas.microsoft.com/office/drawing/2017/decorative" xmlns="" val="0"/>
+                <adec:decorative xmlns="" xmlns:adec="http://schemas.microsoft.com/office/drawing/2017/decorative" val="0"/>
               </a:ext>
             </a:extLst>
           </p:cNvPr>
